--- a/Sante_Maternelle.pptx
+++ b/Sante_Maternelle.pptx
@@ -4766,7 +4766,7 @@
         <p:spPr>
           <a:xfrm>
             <a:off x="1323870" y="3996868"/>
-            <a:ext cx="4577024" cy="523220"/>
+            <a:ext cx="4577024" cy="307777"/>
           </a:xfrm>
           <a:prstGeom prst="rect">
             <a:avLst/>
@@ -4780,20 +4780,20 @@
           <a:lstStyle/>
           <a:p>
             <a:r>
-              <a:rPr lang="fr-FR" sz="1400" i="1" dirty="0">
-                <a:latin typeface="Times New Roman" panose="02020603050405020304" pitchFamily="18" charset="0"/>
-                <a:cs typeface="Times New Roman" panose="02020603050405020304" pitchFamily="18" charset="0"/>
-                <a:hlinkClick r:id="rId4" action="ppaction://hlinkfile"/>
-              </a:rPr>
-              <a:t>file:///C:/Users/USER/Desktop/maternal-health-risk/index.html</a:t>
-            </a:r>
-            <a:r>
-              <a:rPr lang="fr-FR" sz="1400" i="1" dirty="0">
-                <a:latin typeface="Times New Roman" panose="02020603050405020304" pitchFamily="18" charset="0"/>
-                <a:cs typeface="Times New Roman" panose="02020603050405020304" pitchFamily="18" charset="0"/>
-              </a:rPr>
-              <a:t>  </a:t>
-            </a:r>
+              <a:rPr lang="fr-FR" sz="1400" b="1" i="0" u="sng" dirty="0">
+                <a:solidFill>
+                  <a:srgbClr val="0969DA"/>
+                </a:solidFill>
+                <a:effectLst/>
+                <a:latin typeface="Mona Sans VF"/>
+                <a:hlinkClick r:id="rId4"/>
+              </a:rPr>
+              <a:t>https://22616-arch2dt.github.io/maternal-health-risk/</a:t>
+            </a:r>
+            <a:endParaRPr lang="fr-FR" sz="1400" i="1" dirty="0">
+              <a:latin typeface="Times New Roman" panose="02020603050405020304" pitchFamily="18" charset="0"/>
+              <a:cs typeface="Times New Roman" panose="02020603050405020304" pitchFamily="18" charset="0"/>
+            </a:endParaRPr>
           </a:p>
         </p:txBody>
       </p:sp>
